--- a/LabBook_3_BlancaySergio.pptx
+++ b/LabBook_3_BlancaySergio.pptx
@@ -244,7 +244,7 @@
           <a:p>
             <a:fld id="{8438F8DC-35B0-48E6-A86E-42F1F08DD00F}" type="datetimeFigureOut">
               <a:rPr lang="es-ES" smtClean="0"/>
-              <a:t>28/05/2026</a:t>
+              <a:t>29/05/2026</a:t>
             </a:fld>
             <a:endParaRPr lang="es-ES"/>
           </a:p>
@@ -421,7 +421,7 @@
           <a:p>
             <a:fld id="{FACBDC12-F39B-4B97-8F4D-6734F9D366FF}" type="datetimeFigureOut">
               <a:rPr lang="es-ES" smtClean="0"/>
-              <a:t>28/05/2026</a:t>
+              <a:t>29/05/2026</a:t>
             </a:fld>
             <a:endParaRPr lang="es-ES"/>
           </a:p>
@@ -2927,8 +2927,8 @@
           </a:p>
         </p:txBody>
       </p:sp>
-      <mc:AlternateContent xmlns:mc="http://schemas.openxmlformats.org/markup-compatibility/2006" xmlns:a14="http://schemas.microsoft.com/office/drawing/2010/main">
-        <mc:Choice Requires="a14">
+      <mc:AlternateContent xmlns:mc="http://schemas.openxmlformats.org/markup-compatibility/2006">
+        <mc:Choice xmlns:a14="http://schemas.microsoft.com/office/drawing/2010/main" Requires="a14">
           <p:sp>
             <p:nvSpPr>
               <p:cNvPr id="8" name="CuadroTexto 7">
@@ -2944,7 +2944,7 @@
             <p:spPr>
               <a:xfrm>
                 <a:off x="611030" y="3766038"/>
-                <a:ext cx="11199530" cy="2377382"/>
+                <a:ext cx="11199530" cy="2562048"/>
               </a:xfrm>
               <a:prstGeom prst="rect">
                 <a:avLst/>
@@ -2968,7 +2968,7 @@
               <a:p>
                 <a:pPr algn="just"/>
                 <a:r>
-                  <a:rPr lang="en-US" sz="1200" b="1">
+                  <a:rPr lang="en-US" sz="1200" b="1" dirty="0">
                     <a:latin typeface="Arial" panose="020B0604020202020204" pitchFamily="34" charset="0"/>
                     <a:cs typeface="Arial" panose="020B0604020202020204" pitchFamily="34" charset="0"/>
                   </a:rPr>
@@ -2978,21 +2978,21 @@
               <a:p>
                 <a:pPr algn="just"/>
                 <a:r>
-                  <a:rPr lang="es-ES" sz="1200">
+                  <a:rPr lang="es-ES" sz="1200" dirty="0">
                     <a:latin typeface="Arial" panose="020B0604020202020204" pitchFamily="34" charset="0"/>
                     <a:cs typeface="Arial" panose="020B0604020202020204" pitchFamily="34" charset="0"/>
                   </a:rPr>
                   <a:t>La función de transferencia muestra una respuesta espectral con un fondo plano de alta transmisión interrumpido por valles periódicos agudos (resonancias) espaciados exactamente cada 15</a:t>
                 </a:r>
                 <a:r>
-                  <a:rPr lang="es-ES" sz="1200" b="1">
+                  <a:rPr lang="es-ES" sz="1200" b="1" dirty="0">
                     <a:latin typeface="Arial" panose="020B0604020202020204" pitchFamily="34" charset="0"/>
                     <a:cs typeface="Arial" panose="020B0604020202020204" pitchFamily="34" charset="0"/>
                   </a:rPr>
                   <a:t> </a:t>
                 </a:r>
                 <a:r>
-                  <a:rPr lang="es-ES" sz="1200">
+                  <a:rPr lang="es-ES" sz="1200" dirty="0">
                     <a:latin typeface="Arial" panose="020B0604020202020204" pitchFamily="34" charset="0"/>
                     <a:cs typeface="Arial" panose="020B0604020202020204" pitchFamily="34" charset="0"/>
                   </a:rPr>
@@ -3002,13 +3002,13 @@
               <a:p>
                 <a:pPr algn="just"/>
                 <a:r>
-                  <a:rPr lang="es-ES" sz="1200">
+                  <a:rPr lang="es-ES" sz="1200" dirty="0">
                     <a:latin typeface="Arial" panose="020B0604020202020204" pitchFamily="34" charset="0"/>
                     <a:cs typeface="Arial" panose="020B0604020202020204" pitchFamily="34" charset="0"/>
                   </a:rPr>
                   <a:t>El coeficiente de acoplamiento (K) determina el ancho y la profundidad de los valles. Si K es muy alto, los valles se vuelven anchos y poco profundos. A medida que K disminuye, las resonancias se hacen más estrechas (mayor factor de calidad Q) y se profundizan hasta alcanzar la condición de acoplo crítico.</a:t>
                 </a:r>
-                <a:endParaRPr lang="en-US" sz="1200">
+                <a:endParaRPr lang="en-US" sz="1200" dirty="0">
                   <a:latin typeface="Arial" panose="020B0604020202020204" pitchFamily="34" charset="0"/>
                   <a:cs typeface="Arial" panose="020B0604020202020204" pitchFamily="34" charset="0"/>
                 </a:endParaRPr>
@@ -3016,70 +3016,52 @@
               <a:p>
                 <a:pPr algn="just"/>
                 <a:r>
-                  <a:rPr lang="es-ES" sz="1200">
-                    <a:latin typeface="Arial" panose="020B0604020202020204" pitchFamily="34" charset="0"/>
-                    <a:cs typeface="Arial" panose="020B0604020202020204" pitchFamily="34" charset="0"/>
-                  </a:rPr>
-                  <a:t>Para </a:t>
-                </a:r>
-                <a:r>
-                  <a:rPr lang="es-ES" sz="1200" err="1">
-                    <a:latin typeface="Arial" panose="020B0604020202020204" pitchFamily="34" charset="0"/>
-                    <a:cs typeface="Arial" panose="020B0604020202020204" pitchFamily="34" charset="0"/>
-                  </a:rPr>
-                  <a:t>coupling</a:t>
-                </a:r>
-                <a:r>
-                  <a:rPr lang="es-ES" sz="1200">
-                    <a:latin typeface="Arial" panose="020B0604020202020204" pitchFamily="34" charset="0"/>
-                    <a:cs typeface="Arial" panose="020B0604020202020204" pitchFamily="34" charset="0"/>
-                  </a:rPr>
-                  <a:t> = 0.5 (gráfica), el ER = </a:t>
-                </a:r>
-                <a:r>
-                  <a:rPr lang="es-ES" sz="1200" err="1">
+                  <a:rPr lang="es-ES" sz="1200" dirty="0">
+                    <a:latin typeface="Arial" panose="020B0604020202020204" pitchFamily="34" charset="0"/>
+                    <a:cs typeface="Arial" panose="020B0604020202020204" pitchFamily="34" charset="0"/>
+                  </a:rPr>
+                  <a:t>Para k = 0.5 (gráfica), el ER = </a:t>
+                </a:r>
+                <a:r>
+                  <a:rPr lang="es-ES" sz="1200" dirty="0" err="1">
                     <a:latin typeface="Arial" panose="020B0604020202020204" pitchFamily="34" charset="0"/>
                     <a:cs typeface="Arial" panose="020B0604020202020204" pitchFamily="34" charset="0"/>
                   </a:rPr>
                   <a:t>Tmáx</a:t>
                 </a:r>
                 <a:r>
-                  <a:rPr lang="es-ES" sz="1200">
+                  <a:rPr lang="es-ES" sz="1200" dirty="0">
                     <a:latin typeface="Arial" panose="020B0604020202020204" pitchFamily="34" charset="0"/>
                     <a:cs typeface="Arial" panose="020B0604020202020204" pitchFamily="34" charset="0"/>
                   </a:rPr>
                   <a:t> – </a:t>
                 </a:r>
                 <a:r>
-                  <a:rPr lang="es-ES" sz="1200" err="1">
+                  <a:rPr lang="es-ES" sz="1200" dirty="0" err="1">
                     <a:latin typeface="Arial" panose="020B0604020202020204" pitchFamily="34" charset="0"/>
                     <a:cs typeface="Arial" panose="020B0604020202020204" pitchFamily="34" charset="0"/>
                   </a:rPr>
                   <a:t>Tmín</a:t>
                 </a:r>
                 <a:r>
-                  <a:rPr lang="es-ES" sz="1200">
-                    <a:latin typeface="Arial" panose="020B0604020202020204" pitchFamily="34" charset="0"/>
-                    <a:cs typeface="Arial" panose="020B0604020202020204" pitchFamily="34" charset="0"/>
-                  </a:rPr>
-                  <a:t>. Este se obtiene restando el pico superior (0dB) y el fondo del valle.</a:t>
-                </a:r>
-                <a:endParaRPr lang="en-US" sz="1200">
-                  <a:latin typeface="Arial" panose="020B0604020202020204" pitchFamily="34" charset="0"/>
-                  <a:cs typeface="Arial" panose="020B0604020202020204" pitchFamily="34" charset="0"/>
-                </a:endParaRPr>
+                  <a:rPr lang="es-ES" sz="1200" dirty="0">
+                    <a:latin typeface="Arial" panose="020B0604020202020204" pitchFamily="34" charset="0"/>
+                    <a:cs typeface="Arial" panose="020B0604020202020204" pitchFamily="34" charset="0"/>
+                  </a:rPr>
+                  <a:t> = 10.12 dB. Con este valor, indica una disminución de transmisión en resonancia (el sistema no se encuentra en acoplo crítico).</a:t>
+                </a:r>
               </a:p>
               <a:p>
                 <a:pPr algn="just"/>
                 <a:r>
-                  <a:rPr lang="es-ES" sz="1200">
+                  <a:rPr lang="es-ES" sz="1200" dirty="0">
                     <a:latin typeface="Arial" panose="020B0604020202020204" pitchFamily="34" charset="0"/>
                     <a:cs typeface="Arial" panose="020B0604020202020204" pitchFamily="34" charset="0"/>
                   </a:rPr>
                   <a:t>El acoplo crítico ocurre cuando la potencia transmitida en resonancia cae a cero absoluto (-</a:t>
                 </a:r>
                 <a:r>
-                  <a:rPr lang="es-ES" sz="1200">
+                  <a:rPr lang="es-ES" sz="1200" dirty="0">
                     <a:cs typeface="Arial" panose="020B0604020202020204" pitchFamily="34" charset="0"/>
                   </a:rPr>
                   <a:t> </a:t>
@@ -3096,21 +3078,21 @@
                   </m:oMath>
                 </a14:m>
                 <a:r>
-                  <a:rPr lang="es-ES" sz="1200">
+                  <a:rPr lang="es-ES" sz="1200" dirty="0">
                     <a:latin typeface="Arial" panose="020B0604020202020204" pitchFamily="34" charset="0"/>
                     <a:cs typeface="Arial" panose="020B0604020202020204" pitchFamily="34" charset="0"/>
                   </a:rPr>
                   <a:t>dB), lo cual sucede cuando el coeficiente de acoplo (K) iguala exactamente a la pérdida por potencia en una vuelta completa del anillo (</a:t>
                 </a:r>
                 <a:r>
-                  <a:rPr lang="es-ES" sz="1200" err="1">
+                  <a:rPr lang="es-ES" sz="1200" dirty="0" err="1">
                     <a:latin typeface="Arial" panose="020B0604020202020204" pitchFamily="34" charset="0"/>
                     <a:cs typeface="Arial" panose="020B0604020202020204" pitchFamily="34" charset="0"/>
                   </a:rPr>
                   <a:t>Kcrit</a:t>
                 </a:r>
                 <a:r>
-                  <a:rPr lang="es-ES" sz="1200">
+                  <a:rPr lang="es-ES" sz="1200" dirty="0">
                     <a:latin typeface="Arial" panose="020B0604020202020204" pitchFamily="34" charset="0"/>
                     <a:cs typeface="Arial" panose="020B0604020202020204" pitchFamily="34" charset="0"/>
                   </a:rPr>
@@ -3149,21 +3131,21 @@
                   </m:oMath>
                 </a14:m>
                 <a:r>
-                  <a:rPr lang="es-ES" sz="1200">
+                  <a:rPr lang="es-ES" sz="1200" dirty="0">
                     <a:latin typeface="Arial" panose="020B0604020202020204" pitchFamily="34" charset="0"/>
                     <a:cs typeface="Arial" panose="020B0604020202020204" pitchFamily="34" charset="0"/>
                   </a:rPr>
                   <a:t>). Con una pérdida de 0.02dB/</a:t>
                 </a:r>
                 <a:r>
-                  <a:rPr lang="es-ES" sz="1200" err="1">
+                  <a:rPr lang="es-ES" sz="1200" dirty="0" err="1">
                     <a:latin typeface="Arial" panose="020B0604020202020204" pitchFamily="34" charset="0"/>
                     <a:cs typeface="Arial" panose="020B0604020202020204" pitchFamily="34" charset="0"/>
                   </a:rPr>
                   <a:t>um</a:t>
                 </a:r>
                 <a:r>
-                  <a:rPr lang="es-ES" sz="1200">
+                  <a:rPr lang="es-ES" sz="1200" dirty="0">
                     <a:latin typeface="Arial" panose="020B0604020202020204" pitchFamily="34" charset="0"/>
                     <a:cs typeface="Arial" panose="020B0604020202020204" pitchFamily="34" charset="0"/>
                   </a:rPr>
@@ -3209,7 +3191,7 @@
                   </m:oMath>
                 </a14:m>
                 <a:r>
-                  <a:rPr lang="es-ES" sz="1200">
+                  <a:rPr lang="es-ES" sz="1200" dirty="0">
                     <a:latin typeface="Arial" panose="020B0604020202020204" pitchFamily="34" charset="0"/>
                     <a:cs typeface="Arial" panose="020B0604020202020204" pitchFamily="34" charset="0"/>
                   </a:rPr>
@@ -3276,7 +3258,7 @@
                   </m:oMath>
                 </a14:m>
                 <a:r>
-                  <a:rPr lang="es-ES" sz="1200">
+                  <a:rPr lang="es-ES" sz="1200" dirty="0">
                     <a:latin typeface="Arial" panose="020B0604020202020204" pitchFamily="34" charset="0"/>
                     <a:cs typeface="Arial" panose="020B0604020202020204" pitchFamily="34" charset="0"/>
                   </a:rPr>
@@ -3286,27 +3268,27 @@
               <a:p>
                 <a:pPr algn="just"/>
                 <a:r>
-                  <a:rPr lang="es-ES" sz="1200">
+                  <a:rPr lang="es-ES" sz="1200" dirty="0">
                     <a:latin typeface="Arial" panose="020B0604020202020204" pitchFamily="34" charset="0"/>
                     <a:cs typeface="Arial" panose="020B0604020202020204" pitchFamily="34" charset="0"/>
                   </a:rPr>
                   <a:t>Por lo tanto, el acoplo crítico se logra seleccionando exactamente un K = 0.308 (o </a:t>
                 </a:r>
                 <a:r>
-                  <a:rPr lang="es-ES" sz="1200" err="1">
+                  <a:rPr lang="es-ES" sz="1200" dirty="0" err="1">
                     <a:latin typeface="Arial" panose="020B0604020202020204" pitchFamily="34" charset="0"/>
                     <a:cs typeface="Arial" panose="020B0604020202020204" pitchFamily="34" charset="0"/>
                   </a:rPr>
                   <a:t>coupling</a:t>
                 </a:r>
                 <a:r>
-                  <a:rPr lang="es-ES" sz="1200">
+                  <a:rPr lang="es-ES" sz="1200" dirty="0">
                     <a:latin typeface="Arial" panose="020B0604020202020204" pitchFamily="34" charset="0"/>
                     <a:cs typeface="Arial" panose="020B0604020202020204" pitchFamily="34" charset="0"/>
                   </a:rPr>
                   <a:t> = 0.31)</a:t>
                 </a:r>
-                <a:endParaRPr lang="en-US" sz="1200">
+                <a:endParaRPr lang="en-US" sz="1200" dirty="0">
                   <a:latin typeface="Arial" panose="020B0604020202020204" pitchFamily="34" charset="0"/>
                   <a:cs typeface="Arial" panose="020B0604020202020204" pitchFamily="34" charset="0"/>
                 </a:endParaRPr>
@@ -3314,7 +3296,7 @@
               <a:p>
                 <a:pPr algn="just"/>
                 <a:r>
-                  <a:rPr lang="en-US" sz="1200">
+                  <a:rPr lang="en-US" sz="1200" dirty="0">
                     <a:latin typeface="Arial" panose="020B0604020202020204" pitchFamily="34" charset="0"/>
                     <a:cs typeface="Arial" panose="020B0604020202020204" pitchFamily="34" charset="0"/>
                   </a:rPr>
@@ -3324,7 +3306,7 @@
             </p:txBody>
           </p:sp>
         </mc:Choice>
-        <mc:Fallback xmlns="">
+        <mc:Fallback>
           <p:sp>
             <p:nvSpPr>
               <p:cNvPr id="8" name="CuadroTexto 7">
@@ -3342,7 +3324,7 @@
             <p:spPr>
               <a:xfrm>
                 <a:off x="611030" y="3766038"/>
-                <a:ext cx="11199530" cy="2377382"/>
+                <a:ext cx="11199530" cy="2562048"/>
               </a:xfrm>
               <a:prstGeom prst="rect">
                 <a:avLst/>
@@ -3364,7 +3346,7 @@
               <a:lstStyle/>
               <a:p>
                 <a:r>
-                  <a:rPr lang="en-US">
+                  <a:rPr lang="es-ES">
                     <a:noFill/>
                   </a:rPr>
                   <a:t> </a:t>
@@ -5472,13 +5454,13 @@
           <a:p>
             <a:pPr algn="just"/>
             <a:r>
-              <a:rPr lang="en-US" sz="1200" b="1">
+              <a:rPr lang="en-US" sz="1200" b="1" dirty="0">
                 <a:latin typeface="Arial" panose="020B0604020202020204" pitchFamily="34" charset="0"/>
                 <a:cs typeface="Arial" panose="020B0604020202020204" pitchFamily="34" charset="0"/>
               </a:rPr>
               <a:t>Comment results. Try to classify the resonances, in which case are you close to critical coupling? Why?</a:t>
             </a:r>
-            <a:endParaRPr lang="en-US" sz="1200">
+            <a:endParaRPr lang="en-US" sz="1200" dirty="0">
               <a:latin typeface="Arial" panose="020B0604020202020204" pitchFamily="34" charset="0"/>
               <a:cs typeface="Arial" panose="020B0604020202020204" pitchFamily="34" charset="0"/>
             </a:endParaRPr>
@@ -5489,21 +5471,21 @@
               <a:buChar char="-"/>
             </a:pPr>
             <a:r>
-              <a:rPr lang="es-ES" sz="1200">
+              <a:rPr lang="es-ES" sz="1200" dirty="0">
                 <a:latin typeface="Arial" panose="020B0604020202020204" pitchFamily="34" charset="0"/>
                 <a:cs typeface="Arial" panose="020B0604020202020204" pitchFamily="34" charset="0"/>
               </a:rPr>
               <a:t>Caso Ideal (</a:t>
             </a:r>
             <a:r>
-              <a:rPr lang="es-ES" sz="1200" err="1">
+              <a:rPr lang="es-ES" sz="1200" dirty="0" err="1">
                 <a:latin typeface="Arial" panose="020B0604020202020204" pitchFamily="34" charset="0"/>
                 <a:cs typeface="Arial" panose="020B0604020202020204" pitchFamily="34" charset="0"/>
               </a:rPr>
               <a:t>alpha</a:t>
             </a:r>
             <a:r>
-              <a:rPr lang="es-ES" sz="1200">
+              <a:rPr lang="es-ES" sz="1200" dirty="0">
                 <a:latin typeface="Arial" panose="020B0604020202020204" pitchFamily="34" charset="0"/>
                 <a:cs typeface="Arial" panose="020B0604020202020204" pitchFamily="34" charset="0"/>
               </a:rPr>
@@ -5516,46 +5498,46 @@
               <a:buChar char="-"/>
             </a:pPr>
             <a:r>
-              <a:rPr lang="es-ES" sz="1200" err="1">
+              <a:rPr lang="es-ES" sz="1200" dirty="0" err="1">
                 <a:latin typeface="Arial" panose="020B0604020202020204" pitchFamily="34" charset="0"/>
                 <a:cs typeface="Arial" panose="020B0604020202020204" pitchFamily="34" charset="0"/>
               </a:rPr>
               <a:t>Sobracoplado</a:t>
             </a:r>
             <a:r>
-              <a:rPr lang="es-ES" sz="1200">
+              <a:rPr lang="es-ES" sz="1200" dirty="0">
                 <a:latin typeface="Arial" panose="020B0604020202020204" pitchFamily="34" charset="0"/>
                 <a:cs typeface="Arial" panose="020B0604020202020204" pitchFamily="34" charset="0"/>
               </a:rPr>
               <a:t> (Over-</a:t>
             </a:r>
             <a:r>
-              <a:rPr lang="es-ES" sz="1200" err="1">
+              <a:rPr lang="es-ES" sz="1200" dirty="0" err="1">
                 <a:latin typeface="Arial" panose="020B0604020202020204" pitchFamily="34" charset="0"/>
                 <a:cs typeface="Arial" panose="020B0604020202020204" pitchFamily="34" charset="0"/>
               </a:rPr>
               <a:t>coupled</a:t>
             </a:r>
             <a:r>
-              <a:rPr lang="es-ES" sz="1200">
+              <a:rPr lang="es-ES" sz="1200" dirty="0">
                 <a:latin typeface="Arial" panose="020B0604020202020204" pitchFamily="34" charset="0"/>
                 <a:cs typeface="Arial" panose="020B0604020202020204" pitchFamily="34" charset="0"/>
               </a:rPr>
               <a:t>) de </a:t>
             </a:r>
             <a:r>
-              <a:rPr lang="es-ES" sz="1200" err="1">
+              <a:rPr lang="es-ES" sz="1200" dirty="0" err="1">
                 <a:latin typeface="Arial" panose="020B0604020202020204" pitchFamily="34" charset="0"/>
                 <a:cs typeface="Arial" panose="020B0604020202020204" pitchFamily="34" charset="0"/>
               </a:rPr>
               <a:t>alpha</a:t>
             </a:r>
             <a:r>
-              <a:rPr lang="es-ES" sz="1200">
+              <a:rPr lang="es-ES" sz="1200" dirty="0">
                 <a:latin typeface="Arial" panose="020B0604020202020204" pitchFamily="34" charset="0"/>
                 <a:cs typeface="Arial" panose="020B0604020202020204" pitchFamily="34" charset="0"/>
               </a:rPr>
-              <a:t> = 1 a 7dB/cm: Al ser el acoplamiento fijo (K = 0.025) mayor que las pérdidas de esas curvas, los valles resultantes son muy poco profundos.</a:t>
+              <a:t> = 1 a 7dB/cm: Al ser el acoplamiento fijo mayor que las pérdidas de esas curvas, los valles resultantes son muy poco profundos.</a:t>
             </a:r>
           </a:p>
           <a:p>
@@ -5564,21 +5546,21 @@
               <a:buChar char="-"/>
             </a:pPr>
             <a:r>
-              <a:rPr lang="es-ES" sz="1200">
+              <a:rPr lang="es-ES" sz="1200" dirty="0">
                 <a:latin typeface="Arial" panose="020B0604020202020204" pitchFamily="34" charset="0"/>
                 <a:cs typeface="Arial" panose="020B0604020202020204" pitchFamily="34" charset="0"/>
               </a:rPr>
               <a:t>Caso cercano al acoplo crítico: </a:t>
             </a:r>
             <a:r>
-              <a:rPr lang="es-ES" sz="1200" err="1">
+              <a:rPr lang="es-ES" sz="1200" dirty="0" err="1">
                 <a:latin typeface="Arial" panose="020B0604020202020204" pitchFamily="34" charset="0"/>
                 <a:cs typeface="Arial" panose="020B0604020202020204" pitchFamily="34" charset="0"/>
               </a:rPr>
               <a:t>alpha</a:t>
             </a:r>
             <a:r>
-              <a:rPr lang="es-ES" sz="1200">
+              <a:rPr lang="es-ES" sz="1200" dirty="0">
                 <a:latin typeface="Arial" panose="020B0604020202020204" pitchFamily="34" charset="0"/>
                 <a:cs typeface="Arial" panose="020B0604020202020204" pitchFamily="34" charset="0"/>
               </a:rPr>
@@ -5588,13 +5570,13 @@
           <a:p>
             <a:pPr algn="just"/>
             <a:r>
-              <a:rPr lang="es-ES" sz="1200">
+              <a:rPr lang="es-ES" sz="1200" dirty="0">
                 <a:latin typeface="Arial" panose="020B0604020202020204" pitchFamily="34" charset="0"/>
                 <a:cs typeface="Arial" panose="020B0604020202020204" pitchFamily="34" charset="0"/>
               </a:rPr>
-              <a:t>El caso crítico se identifica visualmente porque es la curva que presenta el valle más profundo de todo el barrido (cae hasta 0.09 en lineal y -21dB en logarítmico). Esto demuestra que, a medida que aumentamos las pérdidas internas de la guía, la atenuación por vuelta se va aproximando al valor del acoplamiento fijo (K=0.025), acercando el sistema al punto crítico.</a:t>
-            </a:r>
-            <a:endParaRPr lang="en-US" sz="1200">
+              <a:t>El caso crítico se identifica visualmente porque es la curva que presenta el valle más profundo de todo el barrido (cae hasta 0.09 en lineal y -21dB en logarítmico). Esto demuestra que, a medida que aumentamos las pérdidas internas de la guía, la atenuación por vuelta se va aproximando al valor del acoplamiento fijo, acercando el sistema al punto crítico.</a:t>
+            </a:r>
+            <a:endParaRPr lang="en-US" sz="1200" dirty="0">
               <a:latin typeface="Arial" panose="020B0604020202020204" pitchFamily="34" charset="0"/>
               <a:cs typeface="Arial" panose="020B0604020202020204" pitchFamily="34" charset="0"/>
             </a:endParaRPr>
@@ -7541,7 +7523,7 @@
         <p:spPr>
           <a:xfrm>
             <a:off x="609441" y="4860334"/>
-            <a:ext cx="11199971" cy="1384995"/>
+            <a:ext cx="11199971" cy="1200329"/>
           </a:xfrm>
           <a:prstGeom prst="rect">
             <a:avLst/>
@@ -7565,7 +7547,7 @@
           <a:p>
             <a:pPr algn="just"/>
             <a:r>
-              <a:rPr lang="en-US" sz="1200" b="1">
+              <a:rPr lang="en-US" sz="1200" b="1" dirty="0">
                 <a:latin typeface="Arial" panose="020B0604020202020204" pitchFamily="34" charset="0"/>
                 <a:cs typeface="Arial" panose="020B0604020202020204" pitchFamily="34" charset="0"/>
               </a:rPr>
@@ -7574,7 +7556,7 @@
           </a:p>
           <a:p>
             <a:pPr algn="just"/>
-            <a:endParaRPr lang="en-US" sz="1200">
+            <a:endParaRPr lang="en-US" sz="1200" dirty="0">
               <a:latin typeface="Arial" panose="020B0604020202020204" pitchFamily="34" charset="0"/>
               <a:cs typeface="Arial" panose="020B0604020202020204" pitchFamily="34" charset="0"/>
             </a:endParaRPr>
@@ -7582,76 +7564,41 @@
           <a:p>
             <a:pPr algn="just"/>
             <a:r>
-              <a:rPr lang="es-ES" sz="1200">
+              <a:rPr lang="es-ES" sz="1200" dirty="0">
                 <a:latin typeface="Arial" panose="020B0604020202020204" pitchFamily="34" charset="0"/>
                 <a:cs typeface="Arial" panose="020B0604020202020204" pitchFamily="34" charset="0"/>
               </a:rPr>
-              <a:t>Al ser un interferómetro perfectamente balanceado, no existe diferencia de fase inducida por el camino óptico </a:t>
-            </a:r>
-            <a:r>
-              <a:rPr lang="en-US" sz="1200">
+              <a:t>Al ser un interferómetro perfectamente balanceado (MZI formado por acopladores 50/50), no existe diferencia de fase entre los dos caminos</a:t>
+            </a:r>
+            <a:r>
+              <a:rPr lang="en-US" sz="1200" dirty="0">
                 <a:latin typeface="Arial" panose="020B0604020202020204" pitchFamily="34" charset="0"/>
                 <a:cs typeface="Arial" panose="020B0604020202020204" pitchFamily="34" charset="0"/>
               </a:rPr>
-              <a:t>(∆ᶲ=</a:t>
-            </a:r>
-            <a:r>
-              <a:rPr lang="el-GR" sz="1200">
+              <a:t>.</a:t>
+            </a:r>
+            <a:endParaRPr lang="es-ES" sz="1200" dirty="0">
+              <a:latin typeface="Arial" panose="020B0604020202020204" pitchFamily="34" charset="0"/>
+              <a:cs typeface="Arial" panose="020B0604020202020204" pitchFamily="34" charset="0"/>
+            </a:endParaRPr>
+          </a:p>
+          <a:p>
+            <a:pPr algn="just"/>
+            <a:endParaRPr lang="es-ES" sz="1200" dirty="0">
+              <a:latin typeface="Arial" panose="020B0604020202020204" pitchFamily="34" charset="0"/>
+              <a:cs typeface="Arial" panose="020B0604020202020204" pitchFamily="34" charset="0"/>
+            </a:endParaRPr>
+          </a:p>
+          <a:p>
+            <a:pPr algn="just"/>
+            <a:r>
+              <a:rPr lang="es-ES" sz="1200" dirty="0">
                 <a:latin typeface="Arial" panose="020B0604020202020204" pitchFamily="34" charset="0"/>
                 <a:cs typeface="Arial" panose="020B0604020202020204" pitchFamily="34" charset="0"/>
               </a:rPr>
-              <a:t>β</a:t>
-            </a:r>
-            <a:r>
-              <a:rPr lang="es-ES" sz="1200">
-                <a:latin typeface="Arial" panose="020B0604020202020204" pitchFamily="34" charset="0"/>
-                <a:cs typeface="Arial" panose="020B0604020202020204" pitchFamily="34" charset="0"/>
-              </a:rPr>
-              <a:t>*</a:t>
-            </a:r>
-            <a:r>
-              <a:rPr lang="el-GR" sz="1200">
-                <a:latin typeface="Arial" panose="020B0604020202020204" pitchFamily="34" charset="0"/>
-                <a:cs typeface="Arial" panose="020B0604020202020204" pitchFamily="34" charset="0"/>
-              </a:rPr>
-              <a:t>∆</a:t>
-            </a:r>
-            <a:r>
-              <a:rPr lang="es-ES" sz="1200">
-                <a:latin typeface="Arial" panose="020B0604020202020204" pitchFamily="34" charset="0"/>
-                <a:cs typeface="Arial" panose="020B0604020202020204" pitchFamily="34" charset="0"/>
-              </a:rPr>
-              <a:t>L=0</a:t>
-            </a:r>
-            <a:r>
-              <a:rPr lang="en-US" sz="1200">
-                <a:latin typeface="Arial" panose="020B0604020202020204" pitchFamily="34" charset="0"/>
-                <a:cs typeface="Arial" panose="020B0604020202020204" pitchFamily="34" charset="0"/>
-              </a:rPr>
-              <a:t>).</a:t>
-            </a:r>
-            <a:endParaRPr lang="es-ES" sz="1200">
-              <a:latin typeface="Arial" panose="020B0604020202020204" pitchFamily="34" charset="0"/>
-              <a:cs typeface="Arial" panose="020B0604020202020204" pitchFamily="34" charset="0"/>
-            </a:endParaRPr>
-          </a:p>
-          <a:p>
-            <a:pPr algn="just"/>
-            <a:endParaRPr lang="es-ES" sz="1200">
-              <a:latin typeface="Arial" panose="020B0604020202020204" pitchFamily="34" charset="0"/>
-              <a:cs typeface="Arial" panose="020B0604020202020204" pitchFamily="34" charset="0"/>
-            </a:endParaRPr>
-          </a:p>
-          <a:p>
-            <a:pPr algn="just"/>
-            <a:r>
-              <a:rPr lang="es-ES" sz="1200">
-                <a:latin typeface="Arial" panose="020B0604020202020204" pitchFamily="34" charset="0"/>
-                <a:cs typeface="Arial" panose="020B0604020202020204" pitchFamily="34" charset="0"/>
-              </a:rPr>
-              <a:t>En la gráfica se puede observar que el espectro es completamente plano. Como k=0.5, la potencia se recombina constructivamente en el puerto cruzado (out1) y destructivamente en el de barra (out0). Al no haber retardo diferencial, el dispositivo no filtra y mantiene una transmisión constante de 0 dB en la salida cruzada y nula en la de barra.</a:t>
-            </a:r>
-            <a:endParaRPr lang="en-US" sz="1200">
+              <a:t>En la gráfica se puede observar que el espectro es completamente plano. Como k=0.5, la potencia se recombina constructivamente en el puerto out1 y destructivamente en el puerto out0. Al no haber retardo diferencial, el dispositivo no filtra y mantiene una transmisión constante de 0 dB en out1 y nula en out0.</a:t>
+            </a:r>
+            <a:endParaRPr lang="en-US" sz="1200" dirty="0">
               <a:latin typeface="Arial" panose="020B0604020202020204" pitchFamily="34" charset="0"/>
               <a:cs typeface="Arial" panose="020B0604020202020204" pitchFamily="34" charset="0"/>
             </a:endParaRPr>
@@ -8260,8 +8207,8 @@
           </a:p>
         </p:txBody>
       </p:sp>
-      <mc:AlternateContent xmlns:mc="http://schemas.openxmlformats.org/markup-compatibility/2006" xmlns:a14="http://schemas.microsoft.com/office/drawing/2010/main">
-        <mc:Choice Requires="a14">
+      <mc:AlternateContent xmlns:mc="http://schemas.openxmlformats.org/markup-compatibility/2006">
+        <mc:Choice xmlns:a14="http://schemas.microsoft.com/office/drawing/2010/main" Requires="a14">
           <p:sp>
             <p:nvSpPr>
               <p:cNvPr id="2" name="CuadroTexto 1">
@@ -8277,7 +8224,7 @@
             <p:spPr>
               <a:xfrm>
                 <a:off x="621118" y="4442102"/>
-                <a:ext cx="11199971" cy="1714765"/>
+                <a:ext cx="11199971" cy="1899431"/>
               </a:xfrm>
               <a:prstGeom prst="rect">
                 <a:avLst/>
@@ -8301,7 +8248,7 @@
               <a:p>
                 <a:pPr algn="just"/>
                 <a:r>
-                  <a:rPr lang="en-US" sz="1200" b="1">
+                  <a:rPr lang="en-US" sz="1200" b="1" dirty="0">
                     <a:latin typeface="Arial" panose="020B0604020202020204" pitchFamily="34" charset="0"/>
                     <a:cs typeface="Arial" panose="020B0604020202020204" pitchFamily="34" charset="0"/>
                   </a:rPr>
@@ -8311,174 +8258,174 @@
               <a:p>
                 <a:pPr algn="just"/>
                 <a:r>
-                  <a:rPr lang="en-US" sz="1200">
+                  <a:rPr lang="en-US" sz="1200" dirty="0">
                     <a:latin typeface="Arial" panose="020B0604020202020204" pitchFamily="34" charset="0"/>
                     <a:cs typeface="Arial" panose="020B0604020202020204" pitchFamily="34" charset="0"/>
                   </a:rPr>
                   <a:t>En la </a:t>
                 </a:r>
                 <a:r>
-                  <a:rPr lang="en-US" sz="1200" err="1">
+                  <a:rPr lang="en-US" sz="1200" dirty="0" err="1">
                     <a:latin typeface="Arial" panose="020B0604020202020204" pitchFamily="34" charset="0"/>
                     <a:cs typeface="Arial" panose="020B0604020202020204" pitchFamily="34" charset="0"/>
                   </a:rPr>
                   <a:t>gráfica</a:t>
                 </a:r>
                 <a:r>
-                  <a:rPr lang="en-US" sz="1200">
+                  <a:rPr lang="en-US" sz="1200" dirty="0">
                     <a:latin typeface="Arial" panose="020B0604020202020204" pitchFamily="34" charset="0"/>
                     <a:cs typeface="Arial" panose="020B0604020202020204" pitchFamily="34" charset="0"/>
                   </a:rPr>
                   <a:t> </a:t>
                 </a:r>
                 <a:r>
-                  <a:rPr lang="en-US" sz="1200" err="1">
+                  <a:rPr lang="en-US" sz="1200" dirty="0" err="1">
                     <a:latin typeface="Arial" panose="020B0604020202020204" pitchFamily="34" charset="0"/>
                     <a:cs typeface="Arial" panose="020B0604020202020204" pitchFamily="34" charset="0"/>
                   </a:rPr>
                   <a:t>vemos</a:t>
                 </a:r>
                 <a:r>
-                  <a:rPr lang="en-US" sz="1200">
+                  <a:rPr lang="en-US" sz="1200" dirty="0">
                     <a:latin typeface="Arial" panose="020B0604020202020204" pitchFamily="34" charset="0"/>
                     <a:cs typeface="Arial" panose="020B0604020202020204" pitchFamily="34" charset="0"/>
                   </a:rPr>
                   <a:t> </a:t>
                 </a:r>
                 <a:r>
-                  <a:rPr lang="en-US" sz="1200" err="1">
+                  <a:rPr lang="en-US" sz="1200" dirty="0" err="1">
                     <a:latin typeface="Arial" panose="020B0604020202020204" pitchFamily="34" charset="0"/>
                     <a:cs typeface="Arial" panose="020B0604020202020204" pitchFamily="34" charset="0"/>
                   </a:rPr>
                   <a:t>una</a:t>
                 </a:r>
                 <a:r>
-                  <a:rPr lang="en-US" sz="1200">
+                  <a:rPr lang="en-US" sz="1200" dirty="0">
                     <a:latin typeface="Arial" panose="020B0604020202020204" pitchFamily="34" charset="0"/>
                     <a:cs typeface="Arial" panose="020B0604020202020204" pitchFamily="34" charset="0"/>
                   </a:rPr>
                   <a:t> </a:t>
                 </a:r>
                 <a:r>
-                  <a:rPr lang="en-US" sz="1200" err="1">
+                  <a:rPr lang="en-US" sz="1200" dirty="0" err="1">
                     <a:latin typeface="Arial" panose="020B0604020202020204" pitchFamily="34" charset="0"/>
                     <a:cs typeface="Arial" panose="020B0604020202020204" pitchFamily="34" charset="0"/>
                   </a:rPr>
                   <a:t>respuesta</a:t>
                 </a:r>
                 <a:r>
-                  <a:rPr lang="en-US" sz="1200">
+                  <a:rPr lang="en-US" sz="1200" dirty="0">
                     <a:latin typeface="Arial" panose="020B0604020202020204" pitchFamily="34" charset="0"/>
                     <a:cs typeface="Arial" panose="020B0604020202020204" pitchFamily="34" charset="0"/>
                   </a:rPr>
                   <a:t> </a:t>
                 </a:r>
                 <a:r>
-                  <a:rPr lang="en-US" sz="1200" err="1">
+                  <a:rPr lang="en-US" sz="1200" dirty="0" err="1">
                     <a:latin typeface="Arial" panose="020B0604020202020204" pitchFamily="34" charset="0"/>
                     <a:cs typeface="Arial" panose="020B0604020202020204" pitchFamily="34" charset="0"/>
                   </a:rPr>
                   <a:t>senoidal</a:t>
                 </a:r>
                 <a:r>
-                  <a:rPr lang="en-US" sz="1200">
+                  <a:rPr lang="en-US" sz="1200" dirty="0">
                     <a:latin typeface="Arial" panose="020B0604020202020204" pitchFamily="34" charset="0"/>
                     <a:cs typeface="Arial" panose="020B0604020202020204" pitchFamily="34" charset="0"/>
                   </a:rPr>
                   <a:t> </a:t>
                 </a:r>
                 <a:r>
-                  <a:rPr lang="en-US" sz="1200" err="1">
+                  <a:rPr lang="en-US" sz="1200" dirty="0" err="1">
                     <a:latin typeface="Arial" panose="020B0604020202020204" pitchFamily="34" charset="0"/>
                     <a:cs typeface="Arial" panose="020B0604020202020204" pitchFamily="34" charset="0"/>
                   </a:rPr>
                   <a:t>en</a:t>
                 </a:r>
                 <a:r>
-                  <a:rPr lang="en-US" sz="1200">
+                  <a:rPr lang="en-US" sz="1200" dirty="0">
                     <a:latin typeface="Arial" panose="020B0604020202020204" pitchFamily="34" charset="0"/>
                     <a:cs typeface="Arial" panose="020B0604020202020204" pitchFamily="34" charset="0"/>
                   </a:rPr>
                   <a:t> </a:t>
                 </a:r>
                 <a:r>
-                  <a:rPr lang="en-US" sz="1200" err="1">
+                  <a:rPr lang="en-US" sz="1200" dirty="0" err="1">
                     <a:latin typeface="Arial" panose="020B0604020202020204" pitchFamily="34" charset="0"/>
                     <a:cs typeface="Arial" panose="020B0604020202020204" pitchFamily="34" charset="0"/>
                   </a:rPr>
                   <a:t>lugar</a:t>
                 </a:r>
                 <a:r>
-                  <a:rPr lang="en-US" sz="1200">
+                  <a:rPr lang="en-US" sz="1200" dirty="0">
                     <a:latin typeface="Arial" panose="020B0604020202020204" pitchFamily="34" charset="0"/>
                     <a:cs typeface="Arial" panose="020B0604020202020204" pitchFamily="34" charset="0"/>
                   </a:rPr>
                   <a:t> de </a:t>
                 </a:r>
                 <a:r>
-                  <a:rPr lang="en-US" sz="1200" err="1">
+                  <a:rPr lang="en-US" sz="1200" dirty="0" err="1">
                     <a:latin typeface="Arial" panose="020B0604020202020204" pitchFamily="34" charset="0"/>
                     <a:cs typeface="Arial" panose="020B0604020202020204" pitchFamily="34" charset="0"/>
                   </a:rPr>
                   <a:t>una</a:t>
                 </a:r>
                 <a:r>
-                  <a:rPr lang="en-US" sz="1200">
+                  <a:rPr lang="en-US" sz="1200" dirty="0">
                     <a:latin typeface="Arial" panose="020B0604020202020204" pitchFamily="34" charset="0"/>
                     <a:cs typeface="Arial" panose="020B0604020202020204" pitchFamily="34" charset="0"/>
                   </a:rPr>
                   <a:t> </a:t>
                 </a:r>
                 <a:r>
-                  <a:rPr lang="en-US" sz="1200" err="1">
+                  <a:rPr lang="en-US" sz="1200" dirty="0" err="1">
                     <a:latin typeface="Arial" panose="020B0604020202020204" pitchFamily="34" charset="0"/>
                     <a:cs typeface="Arial" panose="020B0604020202020204" pitchFamily="34" charset="0"/>
                   </a:rPr>
                   <a:t>respuesta</a:t>
                 </a:r>
                 <a:r>
-                  <a:rPr lang="en-US" sz="1200">
+                  <a:rPr lang="en-US" sz="1200" dirty="0">
                     <a:latin typeface="Arial" panose="020B0604020202020204" pitchFamily="34" charset="0"/>
                     <a:cs typeface="Arial" panose="020B0604020202020204" pitchFamily="34" charset="0"/>
                   </a:rPr>
                   <a:t> plana. </a:t>
                 </a:r>
                 <a:r>
-                  <a:rPr lang="en-US" sz="1200" err="1">
+                  <a:rPr lang="en-US" sz="1200" dirty="0" err="1">
                     <a:latin typeface="Arial" panose="020B0604020202020204" pitchFamily="34" charset="0"/>
                     <a:cs typeface="Arial" panose="020B0604020202020204" pitchFamily="34" charset="0"/>
                   </a:rPr>
                   <a:t>Debido</a:t>
                 </a:r>
                 <a:r>
-                  <a:rPr lang="en-US" sz="1200">
+                  <a:rPr lang="en-US" sz="1200" dirty="0">
                     <a:latin typeface="Arial" panose="020B0604020202020204" pitchFamily="34" charset="0"/>
                     <a:cs typeface="Arial" panose="020B0604020202020204" pitchFamily="34" charset="0"/>
                   </a:rPr>
                   <a:t> a </a:t>
                 </a:r>
                 <a:r>
-                  <a:rPr lang="en-US" sz="1200" err="1">
+                  <a:rPr lang="en-US" sz="1200" dirty="0" err="1">
                     <a:latin typeface="Arial" panose="020B0604020202020204" pitchFamily="34" charset="0"/>
                     <a:cs typeface="Arial" panose="020B0604020202020204" pitchFamily="34" charset="0"/>
                   </a:rPr>
                   <a:t>que</a:t>
                 </a:r>
                 <a:r>
-                  <a:rPr lang="en-US" sz="1200">
+                  <a:rPr lang="en-US" sz="1200" dirty="0">
                     <a:latin typeface="Arial" panose="020B0604020202020204" pitchFamily="34" charset="0"/>
                     <a:cs typeface="Arial" panose="020B0604020202020204" pitchFamily="34" charset="0"/>
                   </a:rPr>
                   <a:t> </a:t>
                 </a:r>
                 <a:r>
-                  <a:rPr lang="es-ES" sz="1200">
-                    <a:latin typeface="Arial" panose="020B0604020202020204" pitchFamily="34" charset="0"/>
-                    <a:cs typeface="Arial" panose="020B0604020202020204" pitchFamily="34" charset="0"/>
-                  </a:rPr>
-                  <a:t>∆L = 100 µm, la potencia de entrada oscila entre los puertos de salida out0 (barra) y out1 (cruzado) en función de la longitud de onda.</a:t>
-                </a:r>
-                <a:endParaRPr lang="en-US" sz="1200">
+                  <a:rPr lang="es-ES" sz="1200" dirty="0">
+                    <a:latin typeface="Arial" panose="020B0604020202020204" pitchFamily="34" charset="0"/>
+                    <a:cs typeface="Arial" panose="020B0604020202020204" pitchFamily="34" charset="0"/>
+                  </a:rPr>
+                  <a:t>∆L = 100 µm, la potencia de entrada oscila entre los puertos de salida out0 y out1 en función de la longitud de onda.</a:t>
+                </a:r>
+                <a:endParaRPr lang="en-US" sz="1200" dirty="0">
                   <a:latin typeface="Arial" panose="020B0604020202020204" pitchFamily="34" charset="0"/>
                   <a:cs typeface="Arial" panose="020B0604020202020204" pitchFamily="34" charset="0"/>
                 </a:endParaRPr>
@@ -8486,20 +8433,20 @@
               <a:p>
                 <a:pPr algn="just"/>
                 <a:r>
-                  <a:rPr lang="es-ES" sz="1200">
-                    <a:latin typeface="Arial" panose="020B0604020202020204" pitchFamily="34" charset="0"/>
-                    <a:cs typeface="Arial" panose="020B0604020202020204" pitchFamily="34" charset="0"/>
-                  </a:rPr>
-                  <a:t>El FSR es inversamente proporcional a la diferencia de longitud. A mayor ∆L, las franjas de las interferencias estarán más juntas (menor FSR).</a:t>
-                </a:r>
-                <a:endParaRPr lang="en-US" sz="1200">
+                  <a:rPr lang="es-ES" sz="1200" dirty="0">
+                    <a:latin typeface="Arial" panose="020B0604020202020204" pitchFamily="34" charset="0"/>
+                    <a:cs typeface="Arial" panose="020B0604020202020204" pitchFamily="34" charset="0"/>
+                  </a:rPr>
+                  <a:t>El FSR es la separación entre dos máximos o mínimos consecutivos de la respuesta del MZI y, es inversamente proporcional a la diferencia de longitud. A mayor ∆L, las franjas de las interferencias estarán más juntas (menor FSR).</a:t>
+                </a:r>
+                <a:endParaRPr lang="en-US" sz="1200" dirty="0">
                   <a:latin typeface="Arial" panose="020B0604020202020204" pitchFamily="34" charset="0"/>
                   <a:cs typeface="Arial" panose="020B0604020202020204" pitchFamily="34" charset="0"/>
                 </a:endParaRPr>
               </a:p>
               <a:p>
                 <a:pPr algn="just"/>
-                <a:endParaRPr lang="en-US" sz="1200">
+                <a:endParaRPr lang="en-US" sz="1200" dirty="0">
                   <a:latin typeface="Arial" panose="020B0604020202020204" pitchFamily="34" charset="0"/>
                   <a:cs typeface="Arial" panose="020B0604020202020204" pitchFamily="34" charset="0"/>
                 </a:endParaRPr>
@@ -8507,7 +8454,7 @@
               <a:p>
                 <a:pPr algn="just"/>
                 <a:r>
-                  <a:rPr lang="en-US" sz="1200" b="1">
+                  <a:rPr lang="en-US" sz="1200" b="1" dirty="0">
                     <a:latin typeface="Arial" panose="020B0604020202020204" pitchFamily="34" charset="0"/>
                     <a:cs typeface="Arial" panose="020B0604020202020204" pitchFamily="34" charset="0"/>
                   </a:rPr>
@@ -8517,35 +8464,35 @@
               <a:p>
                 <a:pPr algn="just"/>
                 <a:r>
-                  <a:rPr lang="en-US" sz="1200" err="1">
+                  <a:rPr lang="en-US" sz="1200" dirty="0" err="1">
                     <a:latin typeface="Arial" panose="020B0604020202020204" pitchFamily="34" charset="0"/>
                     <a:cs typeface="Arial" panose="020B0604020202020204" pitchFamily="34" charset="0"/>
                   </a:rPr>
                   <a:t>Utilizando</a:t>
                 </a:r>
                 <a:r>
-                  <a:rPr lang="en-US" sz="1200">
+                  <a:rPr lang="en-US" sz="1200" dirty="0">
                     <a:latin typeface="Arial" panose="020B0604020202020204" pitchFamily="34" charset="0"/>
                     <a:cs typeface="Arial" panose="020B0604020202020204" pitchFamily="34" charset="0"/>
                   </a:rPr>
                   <a:t> </a:t>
                 </a:r>
                 <a:r>
-                  <a:rPr lang="el-GR" sz="1200">
+                  <a:rPr lang="el-GR" sz="1200" dirty="0">
                     <a:latin typeface="Arial" panose="020B0604020202020204" pitchFamily="34" charset="0"/>
                     <a:cs typeface="Arial" panose="020B0604020202020204" pitchFamily="34" charset="0"/>
                   </a:rPr>
                   <a:t>λ</a:t>
                 </a:r>
                 <a:r>
-                  <a:rPr lang="es-ES" sz="1200">
+                  <a:rPr lang="es-ES" sz="1200" dirty="0">
                     <a:latin typeface="Arial" panose="020B0604020202020204" pitchFamily="34" charset="0"/>
                     <a:cs typeface="Arial" panose="020B0604020202020204" pitchFamily="34" charset="0"/>
                   </a:rPr>
                   <a:t>=1.55 µm, ng=2 y ∆L = 100 µm </a:t>
                 </a:r>
                 <a:r>
-                  <a:rPr lang="es-ES" sz="1200">
+                  <a:rPr lang="es-ES" sz="1200" dirty="0">
                     <a:latin typeface="Arial" panose="020B0604020202020204" pitchFamily="34" charset="0"/>
                     <a:cs typeface="Arial" panose="020B0604020202020204" pitchFamily="34" charset="0"/>
                     <a:sym typeface="Wingdings" panose="05000000000000000000" pitchFamily="2" charset="2"/>
@@ -8697,7 +8644,7 @@
                   </m:oMath>
                 </a14:m>
                 <a:r>
-                  <a:rPr lang="es-ES" sz="1200">
+                  <a:rPr lang="es-ES" sz="1200" dirty="0">
                     <a:latin typeface="Arial" panose="020B0604020202020204" pitchFamily="34" charset="0"/>
                     <a:cs typeface="Arial" panose="020B0604020202020204" pitchFamily="34" charset="0"/>
                   </a:rPr>
@@ -8707,175 +8654,175 @@
               <a:p>
                 <a:pPr algn="just"/>
                 <a:r>
-                  <a:rPr lang="en-US" sz="1200">
+                  <a:rPr lang="en-US" sz="1200" dirty="0">
                     <a:latin typeface="Arial" panose="020B0604020202020204" pitchFamily="34" charset="0"/>
                     <a:cs typeface="Arial" panose="020B0604020202020204" pitchFamily="34" charset="0"/>
                   </a:rPr>
                   <a:t>Este </a:t>
                 </a:r>
                 <a:r>
-                  <a:rPr lang="en-US" sz="1200" err="1">
+                  <a:rPr lang="en-US" sz="1200" dirty="0" err="1">
                     <a:latin typeface="Arial" panose="020B0604020202020204" pitchFamily="34" charset="0"/>
                     <a:cs typeface="Arial" panose="020B0604020202020204" pitchFamily="34" charset="0"/>
                   </a:rPr>
                   <a:t>cálculo</a:t>
                 </a:r>
                 <a:r>
-                  <a:rPr lang="en-US" sz="1200">
+                  <a:rPr lang="en-US" sz="1200" dirty="0">
                     <a:latin typeface="Arial" panose="020B0604020202020204" pitchFamily="34" charset="0"/>
                     <a:cs typeface="Arial" panose="020B0604020202020204" pitchFamily="34" charset="0"/>
                   </a:rPr>
                   <a:t> </a:t>
                 </a:r>
                 <a:r>
-                  <a:rPr lang="en-US" sz="1200" err="1">
+                  <a:rPr lang="en-US" sz="1200" dirty="0" err="1">
                     <a:latin typeface="Arial" panose="020B0604020202020204" pitchFamily="34" charset="0"/>
                     <a:cs typeface="Arial" panose="020B0604020202020204" pitchFamily="34" charset="0"/>
                   </a:rPr>
                   <a:t>concide</a:t>
                 </a:r>
                 <a:r>
-                  <a:rPr lang="en-US" sz="1200">
+                  <a:rPr lang="en-US" sz="1200" dirty="0">
                     <a:latin typeface="Arial" panose="020B0604020202020204" pitchFamily="34" charset="0"/>
                     <a:cs typeface="Arial" panose="020B0604020202020204" pitchFamily="34" charset="0"/>
                   </a:rPr>
                   <a:t> con </a:t>
                 </a:r>
                 <a:r>
-                  <a:rPr lang="en-US" sz="1200" err="1">
+                  <a:rPr lang="en-US" sz="1200" dirty="0" err="1">
                     <a:latin typeface="Arial" panose="020B0604020202020204" pitchFamily="34" charset="0"/>
                     <a:cs typeface="Arial" panose="020B0604020202020204" pitchFamily="34" charset="0"/>
                   </a:rPr>
                   <a:t>el</a:t>
                 </a:r>
                 <a:r>
-                  <a:rPr lang="en-US" sz="1200">
+                  <a:rPr lang="en-US" sz="1200" dirty="0">
                     <a:latin typeface="Arial" panose="020B0604020202020204" pitchFamily="34" charset="0"/>
                     <a:cs typeface="Arial" panose="020B0604020202020204" pitchFamily="34" charset="0"/>
                   </a:rPr>
                   <a:t> </a:t>
                 </a:r>
                 <a:r>
-                  <a:rPr lang="en-US" sz="1200" err="1">
+                  <a:rPr lang="en-US" sz="1200" dirty="0" err="1">
                     <a:latin typeface="Arial" panose="020B0604020202020204" pitchFamily="34" charset="0"/>
                     <a:cs typeface="Arial" panose="020B0604020202020204" pitchFamily="34" charset="0"/>
                   </a:rPr>
                   <a:t>comportamiento</a:t>
                 </a:r>
                 <a:r>
-                  <a:rPr lang="en-US" sz="1200">
+                  <a:rPr lang="en-US" sz="1200" dirty="0">
                     <a:latin typeface="Arial" panose="020B0604020202020204" pitchFamily="34" charset="0"/>
                     <a:cs typeface="Arial" panose="020B0604020202020204" pitchFamily="34" charset="0"/>
                   </a:rPr>
                   <a:t> </a:t>
                 </a:r>
                 <a:r>
-                  <a:rPr lang="en-US" sz="1200" err="1">
+                  <a:rPr lang="en-US" sz="1200" dirty="0" err="1">
                     <a:latin typeface="Arial" panose="020B0604020202020204" pitchFamily="34" charset="0"/>
                     <a:cs typeface="Arial" panose="020B0604020202020204" pitchFamily="34" charset="0"/>
                   </a:rPr>
                   <a:t>que</a:t>
                 </a:r>
                 <a:r>
-                  <a:rPr lang="en-US" sz="1200">
+                  <a:rPr lang="en-US" sz="1200" dirty="0">
                     <a:latin typeface="Arial" panose="020B0604020202020204" pitchFamily="34" charset="0"/>
                     <a:cs typeface="Arial" panose="020B0604020202020204" pitchFamily="34" charset="0"/>
                   </a:rPr>
                   <a:t> se </a:t>
                 </a:r>
                 <a:r>
-                  <a:rPr lang="en-US" sz="1200" err="1">
+                  <a:rPr lang="en-US" sz="1200" dirty="0" err="1">
                     <a:latin typeface="Arial" panose="020B0604020202020204" pitchFamily="34" charset="0"/>
                     <a:cs typeface="Arial" panose="020B0604020202020204" pitchFamily="34" charset="0"/>
                   </a:rPr>
                   <a:t>ve</a:t>
                 </a:r>
                 <a:r>
-                  <a:rPr lang="en-US" sz="1200">
+                  <a:rPr lang="en-US" sz="1200" dirty="0">
                     <a:latin typeface="Arial" panose="020B0604020202020204" pitchFamily="34" charset="0"/>
                     <a:cs typeface="Arial" panose="020B0604020202020204" pitchFamily="34" charset="0"/>
                   </a:rPr>
                   <a:t> </a:t>
                 </a:r>
                 <a:r>
-                  <a:rPr lang="en-US" sz="1200" err="1">
+                  <a:rPr lang="en-US" sz="1200" dirty="0" err="1">
                     <a:latin typeface="Arial" panose="020B0604020202020204" pitchFamily="34" charset="0"/>
                     <a:cs typeface="Arial" panose="020B0604020202020204" pitchFamily="34" charset="0"/>
                   </a:rPr>
                   <a:t>en</a:t>
                 </a:r>
                 <a:r>
-                  <a:rPr lang="en-US" sz="1200">
+                  <a:rPr lang="en-US" sz="1200" dirty="0">
                     <a:latin typeface="Arial" panose="020B0604020202020204" pitchFamily="34" charset="0"/>
                     <a:cs typeface="Arial" panose="020B0604020202020204" pitchFamily="34" charset="0"/>
                   </a:rPr>
                   <a:t> la </a:t>
                 </a:r>
                 <a:r>
-                  <a:rPr lang="en-US" sz="1200" err="1">
+                  <a:rPr lang="en-US" sz="1200" dirty="0" err="1">
                     <a:latin typeface="Arial" panose="020B0604020202020204" pitchFamily="34" charset="0"/>
                     <a:cs typeface="Arial" panose="020B0604020202020204" pitchFamily="34" charset="0"/>
                   </a:rPr>
                   <a:t>gráfica</a:t>
                 </a:r>
                 <a:r>
-                  <a:rPr lang="en-US" sz="1200">
+                  <a:rPr lang="en-US" sz="1200" dirty="0">
                     <a:latin typeface="Arial" panose="020B0604020202020204" pitchFamily="34" charset="0"/>
                     <a:cs typeface="Arial" panose="020B0604020202020204" pitchFamily="34" charset="0"/>
                   </a:rPr>
                   <a:t>, </a:t>
                 </a:r>
                 <a:r>
-                  <a:rPr lang="en-US" sz="1200" err="1">
+                  <a:rPr lang="en-US" sz="1200" dirty="0" err="1">
                     <a:latin typeface="Arial" panose="020B0604020202020204" pitchFamily="34" charset="0"/>
                     <a:cs typeface="Arial" panose="020B0604020202020204" pitchFamily="34" charset="0"/>
                   </a:rPr>
                   <a:t>donde</a:t>
                 </a:r>
                 <a:r>
-                  <a:rPr lang="en-US" sz="1200">
+                  <a:rPr lang="en-US" sz="1200" dirty="0">
                     <a:latin typeface="Arial" panose="020B0604020202020204" pitchFamily="34" charset="0"/>
                     <a:cs typeface="Arial" panose="020B0604020202020204" pitchFamily="34" charset="0"/>
                   </a:rPr>
                   <a:t> se </a:t>
                 </a:r>
                 <a:r>
-                  <a:rPr lang="en-US" sz="1200" err="1">
+                  <a:rPr lang="en-US" sz="1200" dirty="0" err="1">
                     <a:latin typeface="Arial" panose="020B0604020202020204" pitchFamily="34" charset="0"/>
                     <a:cs typeface="Arial" panose="020B0604020202020204" pitchFamily="34" charset="0"/>
                   </a:rPr>
                   <a:t>aprecian</a:t>
                 </a:r>
                 <a:r>
-                  <a:rPr lang="en-US" sz="1200">
+                  <a:rPr lang="en-US" sz="1200" dirty="0">
                     <a:latin typeface="Arial" panose="020B0604020202020204" pitchFamily="34" charset="0"/>
                     <a:cs typeface="Arial" panose="020B0604020202020204" pitchFamily="34" charset="0"/>
                   </a:rPr>
                   <a:t> </a:t>
                 </a:r>
                 <a:r>
-                  <a:rPr lang="en-US" sz="1200" err="1">
+                  <a:rPr lang="en-US" sz="1200" dirty="0" err="1">
                     <a:latin typeface="Arial" panose="020B0604020202020204" pitchFamily="34" charset="0"/>
                     <a:cs typeface="Arial" panose="020B0604020202020204" pitchFamily="34" charset="0"/>
                   </a:rPr>
                   <a:t>aproximadamente</a:t>
                 </a:r>
                 <a:r>
-                  <a:rPr lang="en-US" sz="1200">
+                  <a:rPr lang="en-US" sz="1200" dirty="0">
                     <a:latin typeface="Arial" panose="020B0604020202020204" pitchFamily="34" charset="0"/>
                     <a:cs typeface="Arial" panose="020B0604020202020204" pitchFamily="34" charset="0"/>
                   </a:rPr>
                   <a:t> 8.3 </a:t>
                 </a:r>
                 <a:r>
-                  <a:rPr lang="en-US" sz="1200" err="1">
+                  <a:rPr lang="en-US" sz="1200" dirty="0" err="1">
                     <a:latin typeface="Arial" panose="020B0604020202020204" pitchFamily="34" charset="0"/>
                     <a:cs typeface="Arial" panose="020B0604020202020204" pitchFamily="34" charset="0"/>
                   </a:rPr>
                   <a:t>ciclos</a:t>
                 </a:r>
                 <a:r>
-                  <a:rPr lang="en-US" sz="1200">
+                  <a:rPr lang="en-US" sz="1200" dirty="0">
                     <a:latin typeface="Arial" panose="020B0604020202020204" pitchFamily="34" charset="0"/>
                     <a:cs typeface="Arial" panose="020B0604020202020204" pitchFamily="34" charset="0"/>
                   </a:rPr>
@@ -8885,7 +8832,7 @@
             </p:txBody>
           </p:sp>
         </mc:Choice>
-        <mc:Fallback xmlns="">
+        <mc:Fallback>
           <p:sp>
             <p:nvSpPr>
               <p:cNvPr id="2" name="CuadroTexto 1">
@@ -8903,7 +8850,7 @@
             <p:spPr>
               <a:xfrm>
                 <a:off x="621118" y="4442102"/>
-                <a:ext cx="11199971" cy="1714765"/>
+                <a:ext cx="11199971" cy="1899431"/>
               </a:xfrm>
               <a:prstGeom prst="rect">
                 <a:avLst/>
@@ -8911,7 +8858,7 @@
               <a:blipFill>
                 <a:blip r:embed="rId4"/>
                 <a:stretch>
-                  <a:fillRect b="-699"/>
+                  <a:fillRect b="-633"/>
                 </a:stretch>
               </a:blipFill>
               <a:ln w="28575">
@@ -8925,7 +8872,7 @@
               <a:lstStyle/>
               <a:p>
                 <a:r>
-                  <a:rPr lang="en-US">
+                  <a:rPr lang="es-ES">
                     <a:noFill/>
                   </a:rPr>
                   <a:t> </a:t>
@@ -10678,8 +10625,8 @@
           </a:p>
         </p:txBody>
       </p:sp>
-      <mc:AlternateContent xmlns:mc="http://schemas.openxmlformats.org/markup-compatibility/2006" xmlns:a14="http://schemas.microsoft.com/office/drawing/2010/main">
-        <mc:Choice Requires="a14">
+      <mc:AlternateContent xmlns:mc="http://schemas.openxmlformats.org/markup-compatibility/2006">
+        <mc:Choice xmlns:a14="http://schemas.microsoft.com/office/drawing/2010/main" Requires="a14">
           <p:sp>
             <p:nvSpPr>
               <p:cNvPr id="2" name="CuadroTexto 1">
@@ -10695,7 +10642,7 @@
             <p:spPr>
               <a:xfrm>
                 <a:off x="609441" y="4860334"/>
-                <a:ext cx="11199971" cy="1384995"/>
+                <a:ext cx="11199971" cy="1569660"/>
               </a:xfrm>
               <a:prstGeom prst="rect">
                 <a:avLst/>
@@ -10719,7 +10666,7 @@
               <a:p>
                 <a:pPr algn="just"/>
                 <a:r>
-                  <a:rPr lang="en-US" sz="1200" b="1">
+                  <a:rPr lang="en-US" sz="1200" b="1" dirty="0">
                     <a:latin typeface="Arial" panose="020B0604020202020204" pitchFamily="34" charset="0"/>
                     <a:cs typeface="Arial" panose="020B0604020202020204" pitchFamily="34" charset="0"/>
                   </a:rPr>
@@ -10729,11 +10676,26 @@
               <a:p>
                 <a:pPr algn="just"/>
                 <a:r>
-                  <a:rPr lang="es-ES" sz="1200">
-                    <a:latin typeface="Arial" panose="020B0604020202020204" pitchFamily="34" charset="0"/>
-                    <a:cs typeface="Arial" panose="020B0604020202020204" pitchFamily="34" charset="0"/>
-                  </a:rPr>
-                  <a:t>La función de transferencia tiene una forma senoidal muy densa debido al gran desbalance de longitud entre los brazos (∆L ≈ 5.6 cm). La transmisión no oscila entre 0 y 1 en lineal ni llega a </a:t>
+                  <a:rPr lang="es-ES" sz="1200" dirty="0">
+                    <a:latin typeface="Arial" panose="020B0604020202020204" pitchFamily="34" charset="0"/>
+                    <a:cs typeface="Arial" panose="020B0604020202020204" pitchFamily="34" charset="0"/>
+                  </a:rPr>
+                  <a:t>La función de transferencia tiene una forma senoidal muy densa debido al gran desbalance de longitud entre las ramas (∆L ≈ </a:t>
+                </a:r>
+                <a:r>
+                  <a:rPr lang="en-US" sz="1200" dirty="0">
+                    <a:latin typeface="Arial" panose="020B0604020202020204" pitchFamily="34" charset="0"/>
+                    <a:cs typeface="Arial" panose="020B0604020202020204" pitchFamily="34" charset="0"/>
+                    <a:sym typeface="Wingdings" pitchFamily="2" charset="2"/>
+                  </a:rPr>
+                  <a:t>55960.08 um</a:t>
+                </a:r>
+                <a:r>
+                  <a:rPr lang="es-ES" sz="1200" dirty="0">
+                    <a:latin typeface="Arial" panose="020B0604020202020204" pitchFamily="34" charset="0"/>
+                    <a:cs typeface="Arial" panose="020B0604020202020204" pitchFamily="34" charset="0"/>
+                  </a:rPr>
+                  <a:t>). La transmisión no oscila entre 0 y 1 en lineal ni llega a </a:t>
                 </a:r>
                 <a14:m>
                   <m:oMath xmlns:m="http://schemas.openxmlformats.org/officeDocument/2006/math">
@@ -10767,33 +10729,33 @@
                   </m:oMath>
                 </a14:m>
                 <a:r>
-                  <a:rPr lang="es-ES" sz="1200">
-                    <a:latin typeface="Arial" panose="020B0604020202020204" pitchFamily="34" charset="0"/>
-                    <a:cs typeface="Arial" panose="020B0604020202020204" pitchFamily="34" charset="0"/>
-                  </a:rPr>
-                  <a:t> en escala logarítmica debido a la fuerte atenuación sufrida en el brazo largo. </a:t>
+                  <a:rPr lang="es-ES" sz="1200" dirty="0">
+                    <a:latin typeface="Arial" panose="020B0604020202020204" pitchFamily="34" charset="0"/>
+                    <a:cs typeface="Arial" panose="020B0604020202020204" pitchFamily="34" charset="0"/>
+                  </a:rPr>
+                  <a:t> en escala logarítmica debido a la fuerte atenuación sufrida en la rama superior. </a:t>
                 </a:r>
               </a:p>
               <a:p>
                 <a:pPr algn="just"/>
                 <a:r>
-                  <a:rPr lang="es-ES" sz="1200">
-                    <a:latin typeface="Arial" panose="020B0604020202020204" pitchFamily="34" charset="0"/>
-                    <a:cs typeface="Arial" panose="020B0604020202020204" pitchFamily="34" charset="0"/>
-                  </a:rPr>
-                  <a:t>En este Caso 1 sí hay patrón de interferencia ya que, el brazo largo introduce una pérdida por propagación extra de aproximadamente 22.4 dB (4dB/cm*5.596cm). Esto hace que los campos ópticos lleguen con amplitudes muy descompensadas al acoplador de salida, impidiendo una cancelación destructiva perfecta. </a:t>
+                  <a:rPr lang="es-ES" sz="1200" dirty="0">
+                    <a:latin typeface="Arial" panose="020B0604020202020204" pitchFamily="34" charset="0"/>
+                    <a:cs typeface="Arial" panose="020B0604020202020204" pitchFamily="34" charset="0"/>
+                  </a:rPr>
+                  <a:t>En este Caso 1 sí hay patrón de interferencia ya que, la rama superior introduce una pérdida por propagación extra de aproximadamente 22.4 dB (4dB/cm*5.596cm). Esto hace que los campos ópticos lleguen con amplitudes muy descompensadas al acoplador de salida, impidiendo una cancelación destructiva perfecta. </a:t>
                 </a:r>
               </a:p>
               <a:p>
                 <a:pPr algn="just"/>
                 <a:r>
-                  <a:rPr lang="es-ES" sz="1200">
+                  <a:rPr lang="es-ES" sz="1200" dirty="0">
                     <a:latin typeface="Arial" panose="020B0604020202020204" pitchFamily="34" charset="0"/>
                     <a:cs typeface="Arial" panose="020B0604020202020204" pitchFamily="34" charset="0"/>
                   </a:rPr>
                   <a:t>La señal oscila en lineal entre 0.195 y 0.265.</a:t>
                 </a:r>
-                <a:endParaRPr lang="en-US" sz="1200">
+                <a:endParaRPr lang="en-US" sz="1200" dirty="0">
                   <a:latin typeface="Arial" panose="020B0604020202020204" pitchFamily="34" charset="0"/>
                   <a:cs typeface="Arial" panose="020B0604020202020204" pitchFamily="34" charset="0"/>
                 </a:endParaRPr>
@@ -10801,7 +10763,7 @@
             </p:txBody>
           </p:sp>
         </mc:Choice>
-        <mc:Fallback xmlns="">
+        <mc:Fallback>
           <p:sp>
             <p:nvSpPr>
               <p:cNvPr id="2" name="CuadroTexto 1">
@@ -10819,7 +10781,7 @@
             <p:spPr>
               <a:xfrm>
                 <a:off x="609441" y="4860334"/>
-                <a:ext cx="11199971" cy="1384995"/>
+                <a:ext cx="11199971" cy="1569660"/>
               </a:xfrm>
               <a:prstGeom prst="rect">
                 <a:avLst/>
@@ -10827,7 +10789,7 @@
               <a:blipFill>
                 <a:blip r:embed="rId3"/>
                 <a:stretch>
-                  <a:fillRect b="-862"/>
+                  <a:fillRect b="-380"/>
                 </a:stretch>
               </a:blipFill>
               <a:ln w="28575">
@@ -10841,7 +10803,7 @@
               <a:lstStyle/>
               <a:p>
                 <a:r>
-                  <a:rPr lang="en-US">
+                  <a:rPr lang="es-ES">
                     <a:noFill/>
                   </a:rPr>
                   <a:t> </a:t>
@@ -10956,7 +10918,7 @@
           <a:p>
             <a:pPr algn="just"/>
             <a:r>
-              <a:rPr lang="en-US" sz="1600" b="1">
+              <a:rPr lang="en-US" sz="1600" b="1" dirty="0">
                 <a:solidFill>
                   <a:schemeClr val="tx1"/>
                 </a:solidFill>
@@ -10969,7 +10931,7 @@
           <a:p>
             <a:pPr algn="just"/>
             <a:r>
-              <a:rPr lang="en-US" sz="1600" err="1">
+              <a:rPr lang="en-US" sz="1600" dirty="0" err="1">
                 <a:solidFill>
                   <a:schemeClr val="tx1"/>
                 </a:solidFill>
@@ -10980,7 +10942,7 @@
               <a:t>wvl</a:t>
             </a:r>
             <a:r>
-              <a:rPr lang="en-US" sz="1600">
+              <a:rPr lang="en-US" sz="1600" dirty="0">
                 <a:solidFill>
                   <a:schemeClr val="tx1"/>
                 </a:solidFill>
@@ -10994,7 +10956,7 @@
           <a:p>
             <a:pPr algn="just"/>
             <a:r>
-              <a:rPr lang="en-US" sz="1600">
+              <a:rPr lang="en-US" sz="1600" dirty="0">
                 <a:solidFill>
                   <a:schemeClr val="tx1"/>
                 </a:solidFill>
@@ -11008,7 +10970,7 @@
           <a:p>
             <a:pPr algn="just"/>
             <a:r>
-              <a:rPr lang="en-US" sz="1600" err="1">
+              <a:rPr lang="en-US" sz="1600" dirty="0" err="1">
                 <a:solidFill>
                   <a:schemeClr val="tx1"/>
                 </a:solidFill>
@@ -11019,7 +10981,7 @@
               <a:t>n_eff</a:t>
             </a:r>
             <a:r>
-              <a:rPr lang="en-US" sz="1600">
+              <a:rPr lang="en-US" sz="1600" dirty="0">
                 <a:solidFill>
                   <a:schemeClr val="tx1"/>
                 </a:solidFill>
@@ -11033,7 +10995,7 @@
           <a:p>
             <a:pPr algn="just"/>
             <a:r>
-              <a:rPr lang="en-US" sz="1600" err="1">
+              <a:rPr lang="en-US" sz="1600" dirty="0" err="1">
                 <a:solidFill>
                   <a:schemeClr val="tx1"/>
                 </a:solidFill>
@@ -11044,7 +11006,7 @@
               <a:t>n_g</a:t>
             </a:r>
             <a:r>
-              <a:rPr lang="en-US" sz="1600">
+              <a:rPr lang="en-US" sz="1600" dirty="0">
                 <a:solidFill>
                   <a:schemeClr val="tx1"/>
                 </a:solidFill>
@@ -11058,7 +11020,7 @@
           <a:p>
             <a:pPr algn="just"/>
             <a:r>
-              <a:rPr lang="en-US" sz="1600">
+              <a:rPr lang="en-US" sz="1600" dirty="0">
                 <a:solidFill>
                   <a:schemeClr val="tx1"/>
                 </a:solidFill>
@@ -11072,7 +11034,7 @@
           <a:p>
             <a:pPr algn="just"/>
             <a:r>
-              <a:rPr lang="en-US" sz="1600" err="1">
+              <a:rPr lang="en-US" sz="1600" dirty="0" err="1">
                 <a:solidFill>
                   <a:schemeClr val="tx1"/>
                 </a:solidFill>
@@ -11083,7 +11045,7 @@
               <a:t>L_base</a:t>
             </a:r>
             <a:r>
-              <a:rPr lang="en-US" sz="1600">
+              <a:rPr lang="en-US" sz="1600" dirty="0">
                 <a:solidFill>
                   <a:schemeClr val="tx1"/>
                 </a:solidFill>
@@ -11097,7 +11059,7 @@
           <a:p>
             <a:pPr algn="just"/>
             <a:r>
-              <a:rPr lang="en-US" sz="1600">
+              <a:rPr lang="en-US" sz="1600" dirty="0">
                 <a:solidFill>
                   <a:schemeClr val="tx1"/>
                 </a:solidFill>
@@ -11108,7 +11070,7 @@
               <a:t>dL = </a:t>
             </a:r>
             <a:r>
-              <a:rPr lang="en-US" sz="1600" err="1">
+              <a:rPr lang="en-US" sz="1600" dirty="0" err="1">
                 <a:solidFill>
                   <a:schemeClr val="tx1"/>
                 </a:solidFill>
@@ -11119,7 +11081,7 @@
               <a:t>L_base</a:t>
             </a:r>
             <a:r>
-              <a:rPr lang="en-US" sz="1600">
+              <a:rPr lang="en-US" sz="1600" dirty="0">
                 <a:solidFill>
                   <a:schemeClr val="tx1"/>
                 </a:solidFill>
@@ -11133,7 +11095,7 @@
           <a:p>
             <a:pPr algn="just"/>
             <a:r>
-              <a:rPr lang="en-US" sz="1600">
+              <a:rPr lang="en-US" sz="1600" dirty="0">
                 <a:solidFill>
                   <a:schemeClr val="tx1"/>
                 </a:solidFill>
@@ -11147,7 +11109,7 @@
           <a:p>
             <a:pPr algn="just"/>
             <a:r>
-              <a:rPr lang="en-US" sz="1600" b="1">
+              <a:rPr lang="en-US" sz="1600" b="1" dirty="0">
                 <a:solidFill>
                   <a:schemeClr val="tx1"/>
                 </a:solidFill>
@@ -11158,7 +11120,7 @@
               <a:t>Case 1</a:t>
             </a:r>
             <a:r>
-              <a:rPr lang="en-US" sz="1600">
+              <a:rPr lang="en-US" sz="1600" dirty="0">
                 <a:solidFill>
                   <a:schemeClr val="tx1"/>
                 </a:solidFill>
@@ -11169,7 +11131,7 @@
               <a:t>. Simulate for Ka = </a:t>
             </a:r>
             <a:r>
-              <a:rPr lang="en-US" sz="1600" err="1">
+              <a:rPr lang="en-US" sz="1600" dirty="0" err="1">
                 <a:solidFill>
                   <a:schemeClr val="tx1"/>
                 </a:solidFill>
@@ -11180,7 +11142,7 @@
               <a:t>Kb</a:t>
             </a:r>
             <a:r>
-              <a:rPr lang="en-US" sz="1600">
+              <a:rPr lang="en-US" sz="1600" dirty="0">
                 <a:solidFill>
                   <a:schemeClr val="tx1"/>
                 </a:solidFill>
@@ -11191,7 +11153,7 @@
               <a:t> = 0.5 for all </a:t>
             </a:r>
             <a:r>
-              <a:rPr lang="en-US" sz="1600" err="1">
+              <a:rPr lang="en-US" sz="1600" dirty="0" err="1">
                 <a:solidFill>
                   <a:schemeClr val="tx1"/>
                 </a:solidFill>
@@ -11201,7 +11163,7 @@
               </a:rPr>
               <a:t>wvl</a:t>
             </a:r>
-            <a:endParaRPr lang="en-US" sz="1600">
+            <a:endParaRPr lang="en-US" sz="1600" dirty="0">
               <a:solidFill>
                 <a:schemeClr val="tx1"/>
               </a:solidFill>
@@ -11533,7 +11495,7 @@
           <a:p>
             <a:pPr algn="just"/>
             <a:r>
-              <a:rPr lang="en-US" sz="1200" b="1">
+              <a:rPr lang="en-US" sz="1200" b="1" dirty="0">
                 <a:latin typeface="Arial" panose="020B0604020202020204" pitchFamily="34" charset="0"/>
                 <a:cs typeface="Arial" panose="020B0604020202020204" pitchFamily="34" charset="0"/>
               </a:rPr>
@@ -11543,13 +11505,13 @@
           <a:p>
             <a:pPr algn="just"/>
             <a:r>
-              <a:rPr lang="es-ES" sz="1200">
+              <a:rPr lang="es-ES" sz="1200" dirty="0">
                 <a:latin typeface="Arial" panose="020B0604020202020204" pitchFamily="34" charset="0"/>
                 <a:cs typeface="Arial" panose="020B0604020202020204" pitchFamily="34" charset="0"/>
               </a:rPr>
-              <a:t>En este Caso 2 también hay patrón de interferencia, pero está muy degradado. Esto se debe, a que al inyectar solo el 10% de la potencia en el brazo largo, la diferencia de amplitudes en la salida se acentúa críticamente, disminuyendo así la profundidad de las oscilaciones.</a:t>
-            </a:r>
-            <a:endParaRPr lang="en-US" sz="1200">
+              <a:t>En este Caso 2 también hay patrón de interferencia, pero está muy degradado. Esto se debe, a que al inyectar solo el 10% de la potencia en la rama superior, la diferencia de amplitudes en la salida se acentúa críticamente, disminuyendo así la profundidad de las oscilaciones.</a:t>
+            </a:r>
+            <a:endParaRPr lang="en-US" sz="1200" dirty="0">
               <a:latin typeface="Arial" panose="020B0604020202020204" pitchFamily="34" charset="0"/>
               <a:cs typeface="Arial" panose="020B0604020202020204" pitchFamily="34" charset="0"/>
             </a:endParaRPr>
@@ -11557,13 +11519,13 @@
           <a:p>
             <a:pPr algn="just"/>
             <a:r>
-              <a:rPr lang="es-ES" sz="1200">
+              <a:rPr lang="es-ES" sz="1200" dirty="0">
                 <a:latin typeface="Arial" panose="020B0604020202020204" pitchFamily="34" charset="0"/>
                 <a:cs typeface="Arial" panose="020B0604020202020204" pitchFamily="34" charset="0"/>
               </a:rPr>
-              <a:t>La diferencia principal es el desplazamiento vertical de las curvas ya que en el Caso 1 el 50% de la potencia entra al brazo largo y se atenúa casi por completo y la potencia media de salida es menor. Sin embargo, en el Caso 2 el 90% de la potencia viaja por el brazo corto sin pérdidas y esto desplaza toda la gráfica hacia arriba, ya que se pierde menos energía total en el dispositivo</a:t>
-            </a:r>
-            <a:endParaRPr lang="en-US" sz="1200">
+              <a:t>La diferencia principal entre el caso 1 y 2 es el desplazamiento vertical de las curvas ya que en el Caso 1 el 50% de la potencia entra a la rama superior y se atenúa casi por completo y la potencia media de salida es menor. Sin embargo, en el Caso 2 el 90% de la potencia viaja por la rama inferior sin pérdidas y esto desplaza toda la gráfica hacia arriba, ya que se pierde menos energía total en el dispositivo</a:t>
+            </a:r>
+            <a:endParaRPr lang="en-US" sz="1200" dirty="0">
               <a:latin typeface="Arial" panose="020B0604020202020204" pitchFamily="34" charset="0"/>
               <a:cs typeface="Arial" panose="020B0604020202020204" pitchFamily="34" charset="0"/>
             </a:endParaRPr>
@@ -11571,28 +11533,28 @@
           <a:p>
             <a:pPr algn="just"/>
             <a:r>
-              <a:rPr lang="es-ES" sz="1200" u="sng">
+              <a:rPr lang="es-ES" sz="1200" u="sng" dirty="0">
                 <a:latin typeface="Arial" panose="020B0604020202020204" pitchFamily="34" charset="0"/>
                 <a:cs typeface="Arial" panose="020B0604020202020204" pitchFamily="34" charset="0"/>
               </a:rPr>
               <a:t>Comparación del </a:t>
             </a:r>
             <a:r>
-              <a:rPr lang="es-ES" sz="1200" u="sng" err="1">
+              <a:rPr lang="es-ES" sz="1200" u="sng" dirty="0" err="1">
                 <a:latin typeface="Arial" panose="020B0604020202020204" pitchFamily="34" charset="0"/>
                 <a:cs typeface="Arial" panose="020B0604020202020204" pitchFamily="34" charset="0"/>
               </a:rPr>
               <a:t>Extinction</a:t>
             </a:r>
             <a:r>
-              <a:rPr lang="es-ES" sz="1200" u="sng">
+              <a:rPr lang="es-ES" sz="1200" u="sng" dirty="0">
                 <a:latin typeface="Arial" panose="020B0604020202020204" pitchFamily="34" charset="0"/>
                 <a:cs typeface="Arial" panose="020B0604020202020204" pitchFamily="34" charset="0"/>
               </a:rPr>
               <a:t> Ratio </a:t>
             </a:r>
             <a:r>
-              <a:rPr lang="es-ES" sz="1200">
+              <a:rPr lang="es-ES" sz="1200" dirty="0">
                 <a:latin typeface="Arial" panose="020B0604020202020204" pitchFamily="34" charset="0"/>
                 <a:cs typeface="Arial" panose="020B0604020202020204" pitchFamily="34" charset="0"/>
               </a:rPr>
@@ -11602,13 +11564,13 @@
           <a:p>
             <a:pPr algn="just"/>
             <a:r>
-              <a:rPr lang="es-ES" sz="1200">
+              <a:rPr lang="es-ES" sz="1200" dirty="0">
                 <a:latin typeface="Arial" panose="020B0604020202020204" pitchFamily="34" charset="0"/>
                 <a:cs typeface="Arial" panose="020B0604020202020204" pitchFamily="34" charset="0"/>
               </a:rPr>
               <a:t>El Caso 1 ofrece mejor ER porque la división equitativa inicial (50/50) ayuda a mitigar parte del desbalance de amplitud final en comparación con la división asimétrica del Caso 2.</a:t>
             </a:r>
-            <a:endParaRPr lang="en-US" sz="1200">
+            <a:endParaRPr lang="en-US" sz="1200" dirty="0">
               <a:latin typeface="Arial" panose="020B0604020202020204" pitchFamily="34" charset="0"/>
               <a:cs typeface="Arial" panose="020B0604020202020204" pitchFamily="34" charset="0"/>
             </a:endParaRPr>
@@ -15097,20 +15059,20 @@
 </file>
 
 <file path=customXml/item1.xml><?xml version="1.0" encoding="utf-8"?>
-<p:properties xmlns:p="http://schemas.microsoft.com/office/2006/metadata/properties" xmlns:xsi="http://www.w3.org/2001/XMLSchema-instance" xmlns:pc="http://schemas.microsoft.com/office/infopath/2007/PartnerControls">
-  <documentManagement>
-    <_activity xmlns="687df890-2601-448c-be3c-56e27ed810cd" xsi:nil="true"/>
-  </documentManagement>
-</p:properties>
-</file>
-
-<file path=customXml/item2.xml><?xml version="1.0" encoding="utf-8"?>
 <?mso-contentType ?>
 <FormTemplates xmlns="http://schemas.microsoft.com/sharepoint/v3/contenttype/forms">
   <Display>DocumentLibraryForm</Display>
   <Edit>DocumentLibraryForm</Edit>
   <New>DocumentLibraryForm</New>
 </FormTemplates>
+</file>
+
+<file path=customXml/item2.xml><?xml version="1.0" encoding="utf-8"?>
+<p:properties xmlns:p="http://schemas.microsoft.com/office/2006/metadata/properties" xmlns:xsi="http://www.w3.org/2001/XMLSchema-instance" xmlns:pc="http://schemas.microsoft.com/office/infopath/2007/PartnerControls">
+  <documentManagement>
+    <_activity xmlns="687df890-2601-448c-be3c-56e27ed810cd" xsi:nil="true"/>
+  </documentManagement>
+</p:properties>
 </file>
 
 <file path=customXml/item3.xml><?xml version="1.0" encoding="utf-8"?>
@@ -15339,6 +15301,14 @@
 </file>
 
 <file path=customXml/itemProps1.xml><?xml version="1.0" encoding="utf-8"?>
+<ds:datastoreItem xmlns:ds="http://schemas.openxmlformats.org/officeDocument/2006/customXml" ds:itemID="{3216CF8E-2A0E-4801-B8F3-DA9DF38B3553}">
+  <ds:schemaRefs>
+    <ds:schemaRef ds:uri="http://schemas.microsoft.com/sharepoint/v3/contenttype/forms"/>
+  </ds:schemaRefs>
+</ds:datastoreItem>
+</file>
+
+<file path=customXml/itemProps2.xml><?xml version="1.0" encoding="utf-8"?>
 <ds:datastoreItem xmlns:ds="http://schemas.openxmlformats.org/officeDocument/2006/customXml" ds:itemID="{7F7DA6E9-2668-4C5D-AC7A-873E11908874}">
   <ds:schemaRefs>
     <ds:schemaRef ds:uri="http://schemas.openxmlformats.org/package/2006/metadata/core-properties"/>
@@ -15351,14 +15321,6 @@
     <ds:schemaRef ds:uri="687df890-2601-448c-be3c-56e27ed810cd"/>
     <ds:schemaRef ds:uri="http://schemas.microsoft.com/office/2006/metadata/properties"/>
     <ds:schemaRef ds:uri="http://www.w3.org/XML/1998/namespace"/>
-  </ds:schemaRefs>
-</ds:datastoreItem>
-</file>
-
-<file path=customXml/itemProps2.xml><?xml version="1.0" encoding="utf-8"?>
-<ds:datastoreItem xmlns:ds="http://schemas.openxmlformats.org/officeDocument/2006/customXml" ds:itemID="{3216CF8E-2A0E-4801-B8F3-DA9DF38B3553}">
-  <ds:schemaRefs>
-    <ds:schemaRef ds:uri="http://schemas.microsoft.com/sharepoint/v3/contenttype/forms"/>
   </ds:schemaRefs>
 </ds:datastoreItem>
 </file>
